--- a/assets/x/pptx/未投稿/vol32.pptx
+++ b/assets/x/pptx/未投稿/vol32.pptx
@@ -3612,7 +3612,7 @@
         <p:spPr>
           <a:xfrm>
             <a:off x="640080" y="2331720"/>
-            <a:ext cx="2816352" cy="658368"/>
+            <a:ext cx="2816352" cy="676656"/>
           </a:xfrm>
           <a:prstGeom prst="rect">
             <a:avLst/>
@@ -3634,7 +3634,7 @@
               </a:spcAft>
             </a:pPr>
             <a:r>
-              <a:rPr sz="1450" b="1">
+              <a:rPr sz="1600" b="1">
                 <a:solidFill>
                   <a:srgbClr val="4B5563"/>
                 </a:solidFill>
@@ -3653,7 +3653,7 @@
         </p:nvSpPr>
         <p:spPr>
           <a:xfrm>
-            <a:off x="274320" y="3081528"/>
+            <a:off x="274320" y="3099816"/>
             <a:ext cx="365760" cy="658368"/>
           </a:xfrm>
           <a:prstGeom prst="rect">
@@ -3695,8 +3695,8 @@
         </p:nvSpPr>
         <p:spPr>
           <a:xfrm>
-            <a:off x="640080" y="3081528"/>
-            <a:ext cx="2816352" cy="658368"/>
+            <a:off x="640080" y="3099816"/>
+            <a:ext cx="2816352" cy="676656"/>
           </a:xfrm>
           <a:prstGeom prst="rect">
             <a:avLst/>
@@ -3718,7 +3718,7 @@
               </a:spcAft>
             </a:pPr>
             <a:r>
-              <a:rPr sz="1450" b="1">
+              <a:rPr sz="1600" b="1">
                 <a:solidFill>
                   <a:srgbClr val="4B5563"/>
                 </a:solidFill>
@@ -3737,7 +3737,7 @@
         </p:nvSpPr>
         <p:spPr>
           <a:xfrm>
-            <a:off x="274320" y="3831335"/>
+            <a:off x="274320" y="3867911"/>
             <a:ext cx="365760" cy="658368"/>
           </a:xfrm>
           <a:prstGeom prst="rect">
@@ -3779,8 +3779,8 @@
         </p:nvSpPr>
         <p:spPr>
           <a:xfrm>
-            <a:off x="640080" y="3831335"/>
-            <a:ext cx="2816352" cy="658368"/>
+            <a:off x="640080" y="3867911"/>
+            <a:ext cx="2816352" cy="676656"/>
           </a:xfrm>
           <a:prstGeom prst="rect">
             <a:avLst/>
@@ -3802,7 +3802,7 @@
               </a:spcAft>
             </a:pPr>
             <a:r>
-              <a:rPr sz="1450" b="1">
+              <a:rPr sz="1600" b="1">
                 <a:solidFill>
                   <a:srgbClr val="4B5563"/>
                 </a:solidFill>
@@ -3948,7 +3948,7 @@
         <p:spPr>
           <a:xfrm>
             <a:off x="2761488" y="1481328"/>
-            <a:ext cx="620422" cy="932688"/>
+            <a:ext cx="628464" cy="932688"/>
           </a:xfrm>
           <a:prstGeom prst="rect">
             <a:avLst/>
@@ -5054,7 +5054,7 @@
         <p:spPr>
           <a:xfrm>
             <a:off x="8622792" y="2377440"/>
-            <a:ext cx="196948" cy="219456"/>
+            <a:ext cx="213360" cy="237744"/>
           </a:xfrm>
           <a:prstGeom prst="rect">
             <a:avLst/>
@@ -5069,8 +5069,8 @@
         </p:nvSpPr>
         <p:spPr>
           <a:xfrm>
-            <a:off x="8897112" y="2331720"/>
-            <a:ext cx="2999232" cy="658368"/>
+            <a:off x="8915400" y="2331720"/>
+            <a:ext cx="2980944" cy="676656"/>
           </a:xfrm>
           <a:prstGeom prst="rect">
             <a:avLst/>
@@ -5092,7 +5092,7 @@
               </a:spcAft>
             </a:pPr>
             <a:r>
-              <a:rPr sz="1400" b="1">
+              <a:rPr sz="1550" b="1">
                 <a:solidFill>
                   <a:srgbClr val="4B5563"/>
                 </a:solidFill>
@@ -5119,8 +5119,8 @@
         </p:blipFill>
         <p:spPr>
           <a:xfrm>
-            <a:off x="8622792" y="3090672"/>
-            <a:ext cx="196948" cy="219456"/>
+            <a:off x="8622792" y="3108960"/>
+            <a:ext cx="213360" cy="237744"/>
           </a:xfrm>
           <a:prstGeom prst="rect">
             <a:avLst/>
@@ -5135,8 +5135,8 @@
         </p:nvSpPr>
         <p:spPr>
           <a:xfrm>
-            <a:off x="8897112" y="3044952"/>
-            <a:ext cx="2999232" cy="658368"/>
+            <a:off x="8915400" y="3063240"/>
+            <a:ext cx="2980944" cy="676656"/>
           </a:xfrm>
           <a:prstGeom prst="rect">
             <a:avLst/>
@@ -5158,7 +5158,7 @@
               </a:spcAft>
             </a:pPr>
             <a:r>
-              <a:rPr sz="1400" b="1">
+              <a:rPr sz="1550" b="1">
                 <a:solidFill>
                   <a:srgbClr val="4B5563"/>
                 </a:solidFill>
@@ -5185,8 +5185,8 @@
         </p:blipFill>
         <p:spPr>
           <a:xfrm>
-            <a:off x="8622792" y="3803904"/>
-            <a:ext cx="196948" cy="219456"/>
+            <a:off x="8622792" y="3840479"/>
+            <a:ext cx="213360" cy="237744"/>
           </a:xfrm>
           <a:prstGeom prst="rect">
             <a:avLst/>
@@ -5201,8 +5201,8 @@
         </p:nvSpPr>
         <p:spPr>
           <a:xfrm>
-            <a:off x="8897112" y="3758184"/>
-            <a:ext cx="2999232" cy="658368"/>
+            <a:off x="8915400" y="3794759"/>
+            <a:ext cx="2980944" cy="676656"/>
           </a:xfrm>
           <a:prstGeom prst="rect">
             <a:avLst/>
@@ -5224,7 +5224,7 @@
               </a:spcAft>
             </a:pPr>
             <a:r>
-              <a:rPr sz="1400" b="1">
+              <a:rPr sz="1550" b="1">
                 <a:solidFill>
                   <a:srgbClr val="4B5563"/>
                 </a:solidFill>
@@ -5300,7 +5300,7 @@
         <p:spPr>
           <a:xfrm>
             <a:off x="8604504" y="4370831"/>
-            <a:ext cx="648909" cy="896112"/>
+            <a:ext cx="655141" cy="896112"/>
           </a:xfrm>
           <a:prstGeom prst="rect">
             <a:avLst/>
@@ -5491,7 +5491,7 @@
         <p:spPr>
           <a:xfrm>
             <a:off x="128016" y="5522976"/>
-            <a:ext cx="987552" cy="1316736"/>
+            <a:ext cx="995851" cy="1316736"/>
           </a:xfrm>
           <a:prstGeom prst="rect">
             <a:avLst/>
@@ -5637,7 +5637,7 @@
         <p:spPr>
           <a:xfrm>
             <a:off x="6400800" y="5577840"/>
-            <a:ext cx="1339747" cy="1225296"/>
+            <a:ext cx="1336094" cy="1225296"/>
           </a:xfrm>
           <a:prstGeom prst="rect">
             <a:avLst/>
@@ -5723,9 +5723,9 @@
               </a:spcAft>
             </a:pPr>
             <a:r>
-              <a:rPr sz="1300" b="1">
-                <a:solidFill>
-                  <a:srgbClr val="2563EB"/>
+              <a:rPr sz="1400" b="1">
+                <a:solidFill>
+                  <a:srgbClr val="9DC2FF"/>
                 </a:solidFill>
                 <a:latin typeface="Noto Sans JP"/>
               </a:rPr>
@@ -5789,7 +5789,7 @@
         <p:spPr>
           <a:xfrm>
             <a:off x="10972800" y="-128016"/>
-            <a:ext cx="1309023" cy="1847088"/>
+            <a:ext cx="1322703" cy="1847088"/>
           </a:xfrm>
           <a:prstGeom prst="rect">
             <a:avLst/>

--- a/assets/x/pptx/未投稿/vol32.pptx
+++ b/assets/x/pptx/未投稿/vol32.pptx
@@ -5620,33 +5620,9 @@
           </a:p>
         </p:txBody>
       </p:sp>
-      <p:pic>
-        <p:nvPicPr>
-          <p:cNvPr id="60" name="Picture 59" descr="riro_nod.png"/>
-          <p:cNvPicPr>
-            <a:picLocks noChangeAspect="1"/>
-          </p:cNvPicPr>
-          <p:nvPr/>
-        </p:nvPicPr>
-        <p:blipFill>
-          <a:blip r:embed="rId10"/>
-          <a:stretch>
-            <a:fillRect/>
-          </a:stretch>
-        </p:blipFill>
-        <p:spPr>
-          <a:xfrm>
-            <a:off x="6400800" y="5577840"/>
-            <a:ext cx="1336094" cy="1225296"/>
-          </a:xfrm>
-          <a:prstGeom prst="rect">
-            <a:avLst/>
-          </a:prstGeom>
-        </p:spPr>
-      </p:pic>
-      <p:sp>
-        <p:nvSpPr>
-          <p:cNvPr id="61" name="Rounded Rectangle 60"/>
+      <p:sp>
+        <p:nvSpPr>
+          <p:cNvPr id="60" name="Rounded Rectangle 59"/>
           <p:cNvSpPr/>
           <p:nvPr/>
         </p:nvSpPr>
@@ -5694,7 +5670,7 @@
       </p:sp>
       <p:sp>
         <p:nvSpPr>
-          <p:cNvPr id="62" name="TextBox 61"/>
+          <p:cNvPr id="61" name="TextBox 60"/>
           <p:cNvSpPr txBox="1"/>
           <p:nvPr/>
         </p:nvSpPr>
@@ -5774,14 +5750,14 @@
       </p:sp>
       <p:pic>
         <p:nvPicPr>
-          <p:cNvPr id="63" name="Picture 62" descr="chara_laptop.png"/>
+          <p:cNvPr id="62" name="Picture 61" descr="chara_laptop.png"/>
           <p:cNvPicPr>
             <a:picLocks noChangeAspect="1"/>
           </p:cNvPicPr>
           <p:nvPr/>
         </p:nvPicPr>
         <p:blipFill>
-          <a:blip r:embed="rId11"/>
+          <a:blip r:embed="rId10"/>
           <a:stretch>
             <a:fillRect/>
           </a:stretch>
